--- a/docs/pitch/keynote-deck-editable.pptx
+++ b/docs/pitch/keynote-deck-editable.pptx
@@ -520,24 +520,19 @@
           <a:lstStyle/>
           <a:p>
             <a:r>
-              <a:t>⏱ ~8 seconds · 5-min cut: KEEP</a:t>
-            </a:r>
-          </a:p>
-          <a:p/>
-          <a:p>
-            <a:r>
-              <a:t>"Good morning, everyone. I'm here to tell you about Kids Creative Workshop. It's an agentic app for kids, built on the Claude Agent SDK. And before I get into how it works, I want to start with a moment."</a:t>
-            </a:r>
-          </a:p>
-          <a:p/>
-          <a:p>
-            <a:r>
-              <a:t>🎬 Delivery: Warm and slow. Smile on "good morning." Pause briefly after "Claude Agent SDK." Then click forward.</a:t>
-            </a:r>
-          </a:p>
-          <a:p>
-            <a:r>
-              <a:t>➡ Transition: pivots directly into the emotional moment on slide 2.</a:t>
+              <a:t>⏱ ~7 seconds · 5-min cut: KEEP</a:t>
+            </a:r>
+          </a:p>
+          <a:p/>
+          <a:p>
+            <a:r>
+              <a:t>"Good morning. This is Kids Creative Workshop — an agentic app for kids, built on the Claude Agent SDK. Let me start with a moment."</a:t>
+            </a:r>
+          </a:p>
+          <a:p/>
+          <a:p>
+            <a:r>
+              <a:t>🎬 Warm and slow. Pause before "Let me start with a moment."</a:t>
             </a:r>
           </a:p>
         </p:txBody>
@@ -607,72 +602,54 @@
           <a:lstStyle/>
           <a:p>
             <a:r>
-              <a:t>⏱ ~35 seconds · 5-min cut: KEEP</a:t>
-            </a:r>
-          </a:p>
-          <a:p/>
-          <a:p>
-            <a:r>
-              <a:t>"Now inside the backend itself, we keep the same discipline. Seven layers, all talking in one direction.</a:t>
-            </a:r>
-          </a:p>
-          <a:p/>
-          <a:p>
-            <a:r>
-              <a:t>At the top, routes parse the incoming request — we have fourteen route modules.</a:t>
-            </a:r>
-          </a:p>
-          <a:p/>
-          <a:p>
-            <a:r>
-              <a:t>Below that, dependencies handle auth and quota — we use dependency injection, not inline checks.</a:t>
-            </a:r>
-          </a:p>
-          <a:p/>
-          <a:p>
-            <a:r>
-              <a:t>Then the agents layer orchestrates the AI — that's our proxy plus four specialists, all on the Claude Agent SDK.</a:t>
-            </a:r>
-          </a:p>
-          <a:p/>
-          <a:p>
-            <a:r>
-              <a:t>Below that, the MCP servers are the tool layer. Seven of them. Typed envelopes, with what we call the dot-handler calling convention.</a:t>
-            </a:r>
-          </a:p>
-          <a:p/>
-          <a:p>
-            <a:r>
-              <a:t>Then services hold the business logic — fourteen modules, including the shared agent context builder.</a:t>
-            </a:r>
-          </a:p>
-          <a:p/>
-          <a:p>
-            <a:r>
-              <a:t>Repositories wrap database access — twenty of them, one per table.</a:t>
-            </a:r>
-          </a:p>
-          <a:p/>
-          <a:p>
-            <a:r>
-              <a:t>And at the very bottom, the database adapter. SQLite in dev, Postgres plus pgvector in production.</a:t>
-            </a:r>
-          </a:p>
-          <a:p/>
-          <a:p>
-            <a:r>
-              <a:t>The rule is simple: each layer talks down, no layer talks up. That's how we replace any single layer without touching the others."</a:t>
-            </a:r>
-          </a:p>
-          <a:p/>
-          <a:p>
-            <a:r>
-              <a:t>🎬 Delivery: Walk through layer by layer. The closing line — "each layer talks down, no layer talks up" — is the architectural discipline. Land it slowly.</a:t>
-            </a:r>
-          </a:p>
-          <a:p>
-            <a:r>
-              <a:t>➡ Transition: "OK, that's the system. Let me show you what the kid actually sees."</a:t>
+              <a:t>⏱ ~26 seconds · 5-min cut: KEEP</a:t>
+            </a:r>
+          </a:p>
+          <a:p/>
+          <a:p>
+            <a:r>
+              <a:t>"Inside the backend — seven layers, all talking one direction.</a:t>
+            </a:r>
+          </a:p>
+          <a:p/>
+          <a:p>
+            <a:r>
+              <a:t>Routes parse requests. Dependencies handle auth and quota.</a:t>
+            </a:r>
+          </a:p>
+          <a:p/>
+          <a:p>
+            <a:r>
+              <a:t>Agents orchestrate the AI. MCP servers are the tool layer — seven of them.</a:t>
+            </a:r>
+          </a:p>
+          <a:p/>
+          <a:p>
+            <a:r>
+              <a:t>Services hold business logic. Repositories wrap database access — twenty of them.</a:t>
+            </a:r>
+          </a:p>
+          <a:p/>
+          <a:p>
+            <a:r>
+              <a:t>And the database adapter — SQLite in dev, Postgres in production.</a:t>
+            </a:r>
+          </a:p>
+          <a:p/>
+          <a:p>
+            <a:r>
+              <a:t>Each layer talks down, never up. That's how we replace any layer in isolation."</a:t>
+            </a:r>
+          </a:p>
+          <a:p/>
+          <a:p>
+            <a:r>
+              <a:t>🎬 Walk layer by layer. Land "talks down, never up" slowly.</a:t>
+            </a:r>
+          </a:p>
+          <a:p>
+            <a:r>
+              <a:t>➡ Next: "Let me show you what the kid actually sees."</a:t>
             </a:r>
           </a:p>
         </p:txBody>
@@ -742,48 +719,48 @@
           <a:lstStyle/>
           <a:p>
             <a:r>
-              <a:t>⏱ ~30 seconds · 5-min cut: KEEP</a:t>
-            </a:r>
-          </a:p>
-          <a:p/>
-          <a:p>
-            <a:r>
-              <a:t>"Here's the buddy. Three states, one identity.</a:t>
-            </a:r>
-          </a:p>
-          <a:p/>
-          <a:p>
-            <a:r>
-              <a:t>When the child first arrives, there's no buddy yet — just an empty state inviting them to create one.</a:t>
-            </a:r>
-          </a:p>
-          <a:p/>
-          <a:p>
-            <a:r>
-              <a:t>Then they customize. They name their buddy, pick an avatar emoji, choose a theme. This whole step takes about three minutes, and honestly, kids love this part more than the chat itself.</a:t>
-            </a:r>
-          </a:p>
-          <a:p/>
-          <a:p>
-            <a:r>
-              <a:t>Once that's done, they land on the chat screen. The buddy greets them with three starter prompts, and each prompt routes to a different specialist underneath — story, news, or adventure.</a:t>
-            </a:r>
-          </a:p>
-          <a:p/>
-          <a:p>
-            <a:r>
-              <a:t>Three React states. One persona. And the buddy persists across every session through our agent repository."</a:t>
-            </a:r>
-          </a:p>
-          <a:p/>
-          <a:p>
-            <a:r>
-              <a:t>🎬 Delivery: Point at each pane on screen as you describe it. The "kids love this part more than the chat itself" line should feel like a real observation, not a brag — say it casually.</a:t>
-            </a:r>
-          </a:p>
-          <a:p>
-            <a:r>
-              <a:t>➡ Transition: "And here's what their buddy actually creates."</a:t>
+              <a:t>⏱ ~22 seconds · 5-min cut: KEEP</a:t>
+            </a:r>
+          </a:p>
+          <a:p/>
+          <a:p>
+            <a:r>
+              <a:t>"Here's the buddy — three states, one identity.</a:t>
+            </a:r>
+          </a:p>
+          <a:p/>
+          <a:p>
+            <a:r>
+              <a:t>First, the empty state — no buddy yet.</a:t>
+            </a:r>
+          </a:p>
+          <a:p/>
+          <a:p>
+            <a:r>
+              <a:t>Then customize — the child names their buddy, picks an avatar, chooses a theme. Kids love this part.</a:t>
+            </a:r>
+          </a:p>
+          <a:p/>
+          <a:p>
+            <a:r>
+              <a:t>Then chat — the buddy greets them with three starter prompts, each routing to a specialist.</a:t>
+            </a:r>
+          </a:p>
+          <a:p/>
+          <a:p>
+            <a:r>
+              <a:t>Three states, one persona, persisted across every session."</a:t>
+            </a:r>
+          </a:p>
+          <a:p/>
+          <a:p>
+            <a:r>
+              <a:t>🎬 Point at each pane. "Kids love this part" — say it casually, like an observation.</a:t>
+            </a:r>
+          </a:p>
+          <a:p>
+            <a:r>
+              <a:t>➡ Next: "And here's what the buddy actually creates."</a:t>
             </a:r>
           </a:p>
         </p:txBody>
@@ -853,48 +830,48 @@
           <a:lstStyle/>
           <a:p>
             <a:r>
-              <a:t>⏱ ~38 seconds · 5-min cut: KEEP</a:t>
-            </a:r>
-          </a:p>
-          <a:p/>
-          <a:p>
-            <a:r>
-              <a:t>"These are real outputs from the live app. Let me walk you through them.</a:t>
-            </a:r>
-          </a:p>
-          <a:p/>
-          <a:p>
-            <a:r>
-              <a:t>On the left — 'The Singing Shells of Coral Bay.' This is an art story. The child uploaded a drawing, and the buddy turned it into a sixty-second narrative — with their character, Ember, and the rest of the crew. The cover illustration on the left was generated too.</a:t>
-            </a:r>
-          </a:p>
-          <a:p/>
-          <a:p>
-            <a:r>
-              <a:t>In the middle — 'Ember and the Golden Dragon's Cozy Cloud.' This is an interactive story. The same Ember from the art story is now starring in a branching adventure. Down at the bottom, you can see three choices the kid picks from — each one changes the ending.</a:t>
-            </a:r>
-          </a:p>
-          <a:p/>
-          <a:p>
-            <a:r>
-              <a:t>And on the right — 'Amazing Animals and How We Keep Them Safe.' This is a kids daily episode. Cover art, transcript on the side, audio playback. And there's Ember again, this time as the guest anchor.</a:t>
-            </a:r>
-          </a:p>
-          <a:p/>
-          <a:p>
-            <a:r>
-              <a:t>Three different surfaces. Same character across all of them. This is character continuity made real — not just claimed."</a:t>
-            </a:r>
-          </a:p>
-          <a:p/>
-          <a:p>
-            <a:r>
-              <a:t>🎬 Delivery: Point at each pane in order. Say "Ember" by name on each one — that's what makes the character continuity concrete. The closing line — "made real, not just claimed" — is the moat.</a:t>
-            </a:r>
-          </a:p>
-          <a:p>
-            <a:r>
-              <a:t>➡ Transition: "And kids share what they make — safely. Here's how."</a:t>
+              <a:t>⏱ ~28 seconds · 5-min cut: KEEP</a:t>
+            </a:r>
+          </a:p>
+          <a:p/>
+          <a:p>
+            <a:r>
+              <a:t>"These are real outputs from the live app.</a:t>
+            </a:r>
+          </a:p>
+          <a:p/>
+          <a:p>
+            <a:r>
+              <a:t>On the left — an art story. The child's drawing became a sixty-second narrative with their character, Ember.</a:t>
+            </a:r>
+          </a:p>
+          <a:p/>
+          <a:p>
+            <a:r>
+              <a:t>In the middle — an interactive story. The same Ember, now in a branching adventure with three choices.</a:t>
+            </a:r>
+          </a:p>
+          <a:p/>
+          <a:p>
+            <a:r>
+              <a:t>On the right — a kids daily episode. Ember again, as guest anchor, with transcript and audio.</a:t>
+            </a:r>
+          </a:p>
+          <a:p/>
+          <a:p>
+            <a:r>
+              <a:t>Three surfaces, same character. Continuity made real — not just claimed."</a:t>
+            </a:r>
+          </a:p>
+          <a:p/>
+          <a:p>
+            <a:r>
+              <a:t>🎬 Point at each pane. Say "Ember" each time — that makes continuity concrete.</a:t>
+            </a:r>
+          </a:p>
+          <a:p>
+            <a:r>
+              <a:t>➡ Next: "And kids share what they make — safely."</a:t>
             </a:r>
           </a:p>
         </p:txBody>
@@ -964,48 +941,42 @@
           <a:lstStyle/>
           <a:p>
             <a:r>
-              <a:t>⏱ ~32 seconds · 5-min cut: KEEP</a:t>
-            </a:r>
-          </a:p>
-          <a:p/>
-          <a:p>
-            <a:r>
-              <a:t>"OK, so kids share what they create. The question is — how do we do this safely?</a:t>
-            </a:r>
-          </a:p>
-          <a:p/>
-          <a:p>
-            <a:r>
-              <a:t>Here's where most kid-AI products fail COPPA. They join posts back to the users table to get the byline. And somewhere along the way, a child's real name leaks out.</a:t>
-            </a:r>
-          </a:p>
-          <a:p/>
-          <a:p>
-            <a:r>
-              <a:t>We don't have that risk, because our schema doesn't allow it.</a:t>
-            </a:r>
-          </a:p>
-          <a:p/>
-          <a:p>
-            <a:r>
-              <a:t>The hub posts table has agent_name, agent_avatar, agent_title — immutable persona snapshot columns written once at post time. There's no read path that JOINs the users table. The unsafe query literally can't even be expressed.</a:t>
-            </a:r>
-          </a:p>
-          <a:p/>
-          <a:p>
-            <a:r>
-              <a:t>Safety isn't a code review checklist for us. It's a schema invariant, and we have a contract test — test_hub_coppa_invariant — that fails if anyone ever tries to write that join."</a:t>
-            </a:r>
-          </a:p>
-          <a:p/>
-          <a:p>
-            <a:r>
-              <a:t>🎬 Delivery: This is the COPPA moat. The line "the unsafe query literally can't even be expressed" is the key claim — say it slowly. The test name at the end is the receipt.</a:t>
-            </a:r>
-          </a:p>
-          <a:p>
-            <a:r>
-              <a:t>➡ Transition: "And the architecture is built to extend. Let me show you what that looks like in code."</a:t>
+              <a:t>⏱ ~24 seconds · 5-min cut: KEEP</a:t>
+            </a:r>
+          </a:p>
+          <a:p/>
+          <a:p>
+            <a:r>
+              <a:t>"Kids share what they create — safely.</a:t>
+            </a:r>
+          </a:p>
+          <a:p/>
+          <a:p>
+            <a:r>
+              <a:t>Most kid-AI products fail COPPA the same way: they join posts back to the users table for a byline, and a child's name leaks.</a:t>
+            </a:r>
+          </a:p>
+          <a:p/>
+          <a:p>
+            <a:r>
+              <a:t>Our schema doesn't allow it. The hub-posts table has immutable persona snapshot columns. No read path joins the users table.</a:t>
+            </a:r>
+          </a:p>
+          <a:p/>
+          <a:p>
+            <a:r>
+              <a:t>The unsafe query can't even be expressed. Safety is a schema invariant — with a test that enforces it."</a:t>
+            </a:r>
+          </a:p>
+          <a:p/>
+          <a:p>
+            <a:r>
+              <a:t>🎬 The COPPA moat. Say "the unsafe query can't even be expressed" slowly.</a:t>
+            </a:r>
+          </a:p>
+          <a:p>
+            <a:r>
+              <a:t>➡ Next: "And the architecture is built to extend."</a:t>
             </a:r>
           </a:p>
         </p:txBody>
@@ -1075,60 +1046,42 @@
           <a:lstStyle/>
           <a:p>
             <a:r>
-              <a:t>⏱ ~32 seconds · 5-min cut: KEEP</a:t>
-            </a:r>
-          </a:p>
-          <a:p/>
-          <a:p>
-            <a:r>
-              <a:t>"This architecture is open by design. Let me show you.</a:t>
-            </a:r>
-          </a:p>
-          <a:p/>
-          <a:p>
-            <a:r>
-              <a:t>If you want to add a brand new specialist to the buddy team, you write one AgentDefinition. That's it.</a:t>
-            </a:r>
-          </a:p>
-          <a:p/>
-          <a:p>
-            <a:r>
-              <a:t>[gesture at the code on screen]</a:t>
-            </a:r>
-          </a:p>
-          <a:p/>
-          <a:p>
-            <a:r>
-              <a:t>You give it a model — Haiku for speed. You give it a system prompt — that's a markdown file in our prompts folder. You give it a list of tools it can call. And you give it the skills it's allowed to use.</a:t>
-            </a:r>
-          </a:p>
-          <a:p/>
-          <a:p>
-            <a:r>
-              <a:t>Once you register it, the routing picks it up automatically. The proxy's intent classifier reads the specialist's description and learns what trigger phrases route to it.</a:t>
-            </a:r>
-          </a:p>
-          <a:p/>
-          <a:p>
-            <a:r>
-              <a:t>The safety gate runs on every reply, no matter which specialist generated it. And the shared context — persona, tone, child ID, age, and recurring characters — flows in to the new specialist just like the others.</a:t>
-            </a:r>
-          </a:p>
-          <a:p/>
-          <a:p>
-            <a:r>
-              <a:t>And in the future, we'll add an A2A bridge. That lets external agent teams join the buddy's world, using exactly the same contract."</a:t>
-            </a:r>
-          </a:p>
-          <a:p/>
-          <a:p>
-            <a:r>
-              <a:t>🎬 Delivery: Let the audience read the code on screen — don't rush. Then deliver the punchline — "one AgentDefinition" is the whole product claim, the moat. Slow on that.</a:t>
-            </a:r>
-          </a:p>
-          <a:p>
-            <a:r>
-              <a:t>➡ Transition: "And here's where we're headed next."</a:t>
+              <a:t>⏱ ~24 seconds · 5-min cut: KEEP</a:t>
+            </a:r>
+          </a:p>
+          <a:p/>
+          <a:p>
+            <a:r>
+              <a:t>"This architecture is open by design.</a:t>
+            </a:r>
+          </a:p>
+          <a:p/>
+          <a:p>
+            <a:r>
+              <a:t>Adding a new specialist takes one AgentDefinition — a model, a prompt, its tools, its skills.</a:t>
+            </a:r>
+          </a:p>
+          <a:p/>
+          <a:p>
+            <a:r>
+              <a:t>Register it, and routing picks it up automatically. The safety gate still runs on every reply. Shared context still flows in.</a:t>
+            </a:r>
+          </a:p>
+          <a:p/>
+          <a:p>
+            <a:r>
+              <a:t>And in the future, an A2A bridge lets external agent teams join — through the same contract."</a:t>
+            </a:r>
+          </a:p>
+          <a:p/>
+          <a:p>
+            <a:r>
+              <a:t>🎬 Let the audience read the code. "One AgentDefinition" is the moat — slow on that.</a:t>
+            </a:r>
+          </a:p>
+          <a:p>
+            <a:r>
+              <a:t>➡ Next: "And here's where we're headed."</a:t>
             </a:r>
           </a:p>
         </p:txBody>
@@ -1204,48 +1157,48 @@
           <a:p/>
           <a:p>
             <a:r>
-              <a:t>"This is our roadmap. Two phases shipped, two ahead.</a:t>
-            </a:r>
-          </a:p>
-          <a:p/>
-          <a:p>
-            <a:r>
-              <a:t>Phase one was the MVP. Single agent. Image-to-story, plus safety, plus text-to-speech. Ninety-two out of ninety-two stories shipped — all done.</a:t>
-            </a:r>
-          </a:p>
-          <a:p/>
-          <a:p>
-            <a:r>
-              <a:t>Phase two was the agent team. Multi-agent. Memory system. Kids Daily. Community. Per-reply safety. One hundred eighty out of one hundred eighty stories shipped — also done.</a:t>
-            </a:r>
-          </a:p>
-          <a:p/>
-          <a:p>
-            <a:r>
-              <a:t>Phase three is in design right now — video and dynamic picture books, a parent dashboard, and gamification features.</a:t>
-            </a:r>
-          </a:p>
-          <a:p/>
-          <a:p>
-            <a:r>
-              <a:t>Phase four is the vision — autonomous. Multi-step planning, scheduled buddy initiatives, and an A2A bridge so external agent teams can join.</a:t>
-            </a:r>
-          </a:p>
-          <a:p/>
-          <a:p>
-            <a:r>
-              <a:t>And here's the thing I want you to remember about us — we don't just pitch features. We ship them."</a:t>
-            </a:r>
-          </a:p>
-          <a:p/>
-          <a:p>
-            <a:r>
-              <a:t>🎬 Delivery: Tap each phase card on screen as you name it. The closing line — "we don't pitch features, we ship them" — is the receipt. Land it slowly.</a:t>
-            </a:r>
-          </a:p>
-          <a:p>
-            <a:r>
-              <a:t>➡ Transition: "And the engineering rigor behind that velocity is what I want to show you next."</a:t>
+              <a:t>"Our roadmap — two phases shipped, two ahead.</a:t>
+            </a:r>
+          </a:p>
+          <a:p/>
+          <a:p>
+            <a:r>
+              <a:t>Phase one, the MVP — single agent, image-to-story, safety, TTS. Done.</a:t>
+            </a:r>
+          </a:p>
+          <a:p/>
+          <a:p>
+            <a:r>
+              <a:t>Phase two, the agent team — multi-agent, memory, Kids Daily, community. Done.</a:t>
+            </a:r>
+          </a:p>
+          <a:p/>
+          <a:p>
+            <a:r>
+              <a:t>Phase three, in design — video, parent dashboard, gamification.</a:t>
+            </a:r>
+          </a:p>
+          <a:p/>
+          <a:p>
+            <a:r>
+              <a:t>Phase four, the vision — autonomous.</a:t>
+            </a:r>
+          </a:p>
+          <a:p/>
+          <a:p>
+            <a:r>
+              <a:t>We don't pitch features. We ship them."</a:t>
+            </a:r>
+          </a:p>
+          <a:p/>
+          <a:p>
+            <a:r>
+              <a:t>🎬 Tap each phase card. Land "we don't pitch features, we ship them" slowly.</a:t>
+            </a:r>
+          </a:p>
+          <a:p>
+            <a:r>
+              <a:t>➡ Next: "And the engineering rigor behind that velocity."</a:t>
             </a:r>
           </a:p>
         </p:txBody>
@@ -1315,48 +1268,36 @@
           <a:lstStyle/>
           <a:p>
             <a:r>
-              <a:t>⏱ ~28 seconds · 5-min cut: KEEP</a:t>
-            </a:r>
-          </a:p>
-          <a:p/>
-          <a:p>
-            <a:r>
-              <a:t>"So where are we today?</a:t>
-            </a:r>
-          </a:p>
-          <a:p/>
-          <a:p>
-            <a:r>
-              <a:t>Two hundred and ninety-two tracked work items across the product backlog. Phase one — the MVP single-agent — done. Phase two — the multi-agent team plus community — done. Phase three — video, parent dashboard, and achievement surfaces — moving into build.</a:t>
-            </a:r>
-          </a:p>
-          <a:p/>
-          <a:p>
-            <a:r>
-              <a:t>Engineering rigor matters to us as much as features do.</a:t>
-            </a:r>
-          </a:p>
-          <a:p/>
-          <a:p>
-            <a:r>
-              <a:t>We have over seven hundred contract tests. Per-reply programmatic safety on every output. We even caught and fixed a silent safety bypass in our own code in twenty-four hours. And we landed a merge train of seven pull requests just last week.</a:t>
-            </a:r>
-          </a:p>
-          <a:p/>
-          <a:p>
-            <a:r>
-              <a:t>Like I said — we don't pitch features. We ship them."</a:t>
-            </a:r>
-          </a:p>
-          <a:p/>
-          <a:p>
-            <a:r>
-              <a:t>🎬 Delivery: Speak the numbers out loud as words — "two hundred seventy-two" sounds bigger than "272." If you have real pilot users or feedback, swap them in for the test counts. The closing repeats slide 15's line — that's intentional, it lands the receipt.</a:t>
-            </a:r>
-          </a:p>
-          <a:p>
-            <a:r>
-              <a:t>➡ Transition: "And we own our bugs too. Let me show you some."</a:t>
+              <a:t>⏱ ~22 seconds · 5-min cut: KEEP</a:t>
+            </a:r>
+          </a:p>
+          <a:p/>
+          <a:p>
+            <a:r>
+              <a:t>"Where we are today. Two hundred ninety-two tracked work items — phases one and two done, phase three moving into build.</a:t>
+            </a:r>
+          </a:p>
+          <a:p/>
+          <a:p>
+            <a:r>
+              <a:t>The engineering rigor: over seven hundred contract tests, per-reply safety, a silent safety bug we caught and fixed in twenty-four hours.</a:t>
+            </a:r>
+          </a:p>
+          <a:p/>
+          <a:p>
+            <a:r>
+              <a:t>We don't pitch features. We ship them."</a:t>
+            </a:r>
+          </a:p>
+          <a:p/>
+          <a:p>
+            <a:r>
+              <a:t>🎬 Speak numbers as words. If you have real pilot data, swap it in. Closing repeats slide 15 on purpose — lands the receipt.</a:t>
+            </a:r>
+          </a:p>
+          <a:p>
+            <a:r>
+              <a:t>➡ Next: "And we own our bugs too."</a:t>
             </a:r>
           </a:p>
         </p:txBody>
@@ -1426,48 +1367,48 @@
           <a:lstStyle/>
           <a:p>
             <a:r>
-              <a:t>⏱ ~35 seconds · 5-min cut: DEFAULT-CUT (keep for 6-min slot)</a:t>
-            </a:r>
-          </a:p>
-          <a:p/>
-          <a:p>
-            <a:r>
-              <a:t>"This is the slide most pitches don't have. We want to show you the bugs we caught — because how a team catches its own bugs tells you more than any feature list.</a:t>
-            </a:r>
-          </a:p>
-          <a:p/>
-          <a:p>
-            <a:r>
-              <a:t>First one. We tried running the SDK as a subprocess for image-to-story. Railway kept killing it — out of memory under load. So we ported all three generation agents to a direct API. Got half the memory back overnight.</a:t>
-            </a:r>
-          </a:p>
-          <a:p/>
-          <a:p>
-            <a:r>
-              <a:t>Second one. We were calling check-content-safety the wrong way. Turns out the wrapper isn't callable directly. The TypeError got swallowed silently. Every story was shipping with a default safety score of point-nine — which looked fine, but wasn't real. We caught it ourselves, in our own code, and fixed it in twenty-four hours.</a:t>
-            </a:r>
-          </a:p>
-          <a:p/>
-          <a:p>
-            <a:r>
-              <a:t>Third one. We tried using a single agent plus a safety prompt. The model occasionally produced replies that weren't safe enough. So we built the per-reply programmatic safety with suggest-and-retry that you saw earlier.</a:t>
-            </a:r>
-          </a:p>
-          <a:p/>
-          <a:p>
-            <a:r>
-              <a:t>Most pitches hide their bugs. We name ours."</a:t>
-            </a:r>
-          </a:p>
-          <a:p/>
-          <a:p>
-            <a:r>
-              <a:t>🎬 Delivery: Counter-intuitive slide. Speak each row in ~9 seconds. The 24-hour bypass story is the receipt — speak it slowly.</a:t>
-            </a:r>
-          </a:p>
-          <a:p>
-            <a:r>
-              <a:t>➡ Transition: "Here's why this matters."</a:t>
+              <a:t>⏱ ~26 seconds · 5-min cut: DEFAULT-CUT (keep for 6-min slot)</a:t>
+            </a:r>
+          </a:p>
+          <a:p/>
+          <a:p>
+            <a:r>
+              <a:t>"This is the slide most pitches don't have — the bugs we caught.</a:t>
+            </a:r>
+          </a:p>
+          <a:p/>
+          <a:p>
+            <a:r>
+              <a:t>One — we ran the SDK as a subprocess. Railway killed it on memory. We ported to a direct API and got half the memory back.</a:t>
+            </a:r>
+          </a:p>
+          <a:p/>
+          <a:p>
+            <a:r>
+              <a:t>Two — we called the safety check the wrong way. A swallowed error meant stories shipped with a fake score. We caught it ourselves, fixed it in a day.</a:t>
+            </a:r>
+          </a:p>
+          <a:p/>
+          <a:p>
+            <a:r>
+              <a:t>Three — a single agent with a safety prompt wasn't enough. So we built per-reply programmatic safety.</a:t>
+            </a:r>
+          </a:p>
+          <a:p/>
+          <a:p>
+            <a:r>
+              <a:t>Most pitches hide bugs. We name ours."</a:t>
+            </a:r>
+          </a:p>
+          <a:p/>
+          <a:p>
+            <a:r>
+              <a:t>🎬 Speak each row in ~7 seconds. The 24-hour bug story is the receipt — slow on it.</a:t>
+            </a:r>
+          </a:p>
+          <a:p>
+            <a:r>
+              <a:t>➡ Next: "Here's why this matters."</a:t>
             </a:r>
           </a:p>
         </p:txBody>
@@ -1537,49 +1478,49 @@
           <a:lstStyle/>
           <a:p>
             <a:r>
-              <a:t>⏱ ~30 seconds · 5-min cut: KEEP</a:t>
-            </a:r>
-          </a:p>
-          <a:p/>
-          <a:p>
-            <a:r>
-              <a:t>"So here's why this matters.</a:t>
-            </a:r>
-          </a:p>
-          <a:p/>
-          <a:p>
-            <a:r>
-              <a:t>We're agentic from day one. This isn't a wrapper, it isn't just a prompt. It's a real SDK, with real tools, and real orchestration underneath.</a:t>
-            </a:r>
-          </a:p>
-          <a:p/>
-          <a:p>
-            <a:r>
-              <a:t>We've tracked two hundred ninety-two work items across shipped and planned milestones — that's our execution proof.</a:t>
-            </a:r>
-          </a:p>
-          <a:p/>
-          <a:p>
-            <a:r>
-              <a:t>We have programmatic safety on every reply — non-negotiable, code-enforced. No vibes.</a:t>
-            </a:r>
-          </a:p>
-          <a:p/>
-          <a:p>
-            <a:r>
-              <a:t>We've built a community that protects child PII at the schema level — COPPA by construction.</a:t>
-            </a:r>
-          </a:p>
-          <a:p/>
-          <a:p>
-            <a:r>
-              <a:t>And we've built a buddy that genuinely grows with the child — character continuity across the image story, the interactive adventure, the podcast, and the share.</a:t>
-            </a:r>
-          </a:p>
-          <a:p/>
-          <a:p>
-            <a:r>
-              <a:t>[pause for 2 seconds]</a:t>
+              <a:t>⏱ ~24 seconds · 5-min cut: KEEP</a:t>
+            </a:r>
+          </a:p>
+          <a:p/>
+          <a:p>
+            <a:r>
+              <a:t>"Why this matters.</a:t>
+            </a:r>
+          </a:p>
+          <a:p/>
+          <a:p>
+            <a:r>
+              <a:t>Agentic from day one — real SDK, real tools, real orchestration. Not a wrapper.</a:t>
+            </a:r>
+          </a:p>
+          <a:p/>
+          <a:p>
+            <a:r>
+              <a:t>292 tracked work items across shipped and planned milestones — execution proof.</a:t>
+            </a:r>
+          </a:p>
+          <a:p/>
+          <a:p>
+            <a:r>
+              <a:t>Programmatic safety on every reply — code-enforced, not vibes.</a:t>
+            </a:r>
+          </a:p>
+          <a:p/>
+          <a:p>
+            <a:r>
+              <a:t>A community that protects child PII at the schema level.</a:t>
+            </a:r>
+          </a:p>
+          <a:p/>
+          <a:p>
+            <a:r>
+              <a:t>A buddy that grows with the child.</a:t>
+            </a:r>
+          </a:p>
+          <a:p/>
+          <a:p>
+            <a:r>
+              <a:t>[pause]</a:t>
             </a:r>
           </a:p>
           <a:p/>
@@ -1591,19 +1532,19 @@
           <a:p/>
           <a:p>
             <a:r>
-              <a:t>[pause, hold eye contact for 2 more seconds]</a:t>
-            </a:r>
-          </a:p>
-          <a:p/>
-          <a:p>
-            <a:r>
-              <a:t>I'd love to take any questions you have."</a:t>
-            </a:r>
-          </a:p>
-          <a:p/>
-          <a:p>
-            <a:r>
-              <a:t>🎬 Delivery: Read each "we've..." line briskly so they stack. Then pause hard before the closing line. Deliver "AI that grows up with kids — safely" slowly, holding eye contact. Don't smile until you've finished asking for questions.</a:t>
+              <a:t>[pause — hold eye contact]</a:t>
+            </a:r>
+          </a:p>
+          <a:p/>
+          <a:p>
+            <a:r>
+              <a:t>I'd love to take your questions."</a:t>
+            </a:r>
+          </a:p>
+          <a:p/>
+          <a:p>
+            <a:r>
+              <a:t>🎬 Stack the lines briskly. Hard pause before "AI that grows up with kids — safely." Don't smile until you've asked for questions.</a:t>
             </a:r>
           </a:p>
           <a:p>
@@ -1810,66 +1751,60 @@
           <a:lstStyle/>
           <a:p>
             <a:r>
-              <a:t>⏱ ~30 seconds · 5-min cut: KEEP</a:t>
-            </a:r>
-          </a:p>
-          <a:p/>
-          <a:p>
-            <a:r>
-              <a:t>"Picture three moments in a kid's day.</a:t>
-            </a:r>
-          </a:p>
-          <a:p/>
-          <a:p>
-            <a:r>
-              <a:t>The first one: a five-year-old hands her drawing to her buddy, and watches it become a story — with her character, in her voice.</a:t>
-            </a:r>
-          </a:p>
-          <a:p/>
-          <a:p>
-            <a:r>
-              <a:t>[pause for 2 seconds]</a:t>
-            </a:r>
-          </a:p>
-          <a:p/>
-          <a:p>
-            <a:r>
-              <a:t>The second: that same character — the one she just invented — stars in the next adventure. Her choices, her ending.</a:t>
-            </a:r>
-          </a:p>
-          <a:p/>
-          <a:p>
-            <a:r>
-              <a:t>[pause for 2 seconds]</a:t>
-            </a:r>
-          </a:p>
-          <a:p/>
-          <a:p>
-            <a:r>
-              <a:t>The third: tomorrow morning, today's news arrives as her own podcast. Kid-safe, in her buddy's voice.</a:t>
-            </a:r>
-          </a:p>
-          <a:p/>
-          <a:p>
-            <a:r>
-              <a:t>[pause for 3 seconds]</a:t>
-            </a:r>
-          </a:p>
-          <a:p/>
-          <a:p>
-            <a:r>
-              <a:t>One buddy. Three kinds of moments. Her world, every time."</a:t>
-            </a:r>
-          </a:p>
-          <a:p/>
-          <a:p>
-            <a:r>
-              <a:t>🎬 Delivery: Slow down a lot here. The pauses ARE the slide. Don't rush. If you feel the silence is awkward, it's probably the right length.</a:t>
-            </a:r>
-          </a:p>
-          <a:p>
-            <a:r>
-              <a:t>➡ Transition: "But today's AI fails her on every single one of those moments. Here's how."</a:t>
+              <a:t>⏱ ~22 seconds · 5-min cut: KEEP</a:t>
+            </a:r>
+          </a:p>
+          <a:p/>
+          <a:p>
+            <a:r>
+              <a:t>"Three moments in a kid's day.</a:t>
+            </a:r>
+          </a:p>
+          <a:p/>
+          <a:p>
+            <a:r>
+              <a:t>She hands her drawing to her buddy — and it becomes a story, in her character.</a:t>
+            </a:r>
+          </a:p>
+          <a:p/>
+          <a:p>
+            <a:r>
+              <a:t>[pause]</a:t>
+            </a:r>
+          </a:p>
+          <a:p/>
+          <a:p>
+            <a:r>
+              <a:t>That same character stars in the next adventure — her choices, her ending.</a:t>
+            </a:r>
+          </a:p>
+          <a:p/>
+          <a:p>
+            <a:r>
+              <a:t>[pause]</a:t>
+            </a:r>
+          </a:p>
+          <a:p/>
+          <a:p>
+            <a:r>
+              <a:t>And tomorrow's news arrives as her own podcast — kid-safe.</a:t>
+            </a:r>
+          </a:p>
+          <a:p/>
+          <a:p>
+            <a:r>
+              <a:t>One buddy. Three moments. Her world, every time."</a:t>
+            </a:r>
+          </a:p>
+          <a:p/>
+          <a:p>
+            <a:r>
+              <a:t>🎬 Slow down. The pauses are the slide.</a:t>
+            </a:r>
+          </a:p>
+          <a:p>
+            <a:r>
+              <a:t>➡ Next: "But today's AI fails her on every one of these."</a:t>
             </a:r>
           </a:p>
         </p:txBody>
@@ -1939,7 +1874,7 @@
           <a:lstStyle/>
           <a:p>
             <a:r>
-              <a:t>⏱ ~30 seconds · 5-min cut: KEEP</a:t>
+              <a:t>⏱ ~24 seconds · 5-min cut: KEEP</a:t>
             </a:r>
           </a:p>
           <a:p/>
@@ -1951,48 +1886,42 @@
           <a:p/>
           <a:p>
             <a:r>
-              <a:t>First, it's not personalized enough. Outputs are generic. There's no memory of her characters, her voice, or her age.</a:t>
-            </a:r>
-          </a:p>
-          <a:p/>
-          <a:p>
-            <a:r>
-              <a:t>Second, it's not highly customized. Every child gets the same prompt and gets back the same answer. There's no buddy identity, no per-child capability set.</a:t>
-            </a:r>
-          </a:p>
-          <a:p/>
-          <a:p>
-            <a:r>
-              <a:t>Third, there's no news that's actually suited for kids. Today's news products are adult-first. No age-aware filter, no narrative voice for kids.</a:t>
-            </a:r>
-          </a:p>
-          <a:p/>
-          <a:p>
-            <a:r>
-              <a:t>And fourth, there's no long-term persistence. Every session resets. Lightning the puppy that the kid drew last Friday? Forgotten by Monday.</a:t>
-            </a:r>
-          </a:p>
-          <a:p/>
-          <a:p>
-            <a:r>
-              <a:t>[pause briefly]</a:t>
-            </a:r>
-          </a:p>
-          <a:p/>
-          <a:p>
-            <a:r>
-              <a:t>Existing AI extracts from kids. We want to collaborate with them."</a:t>
-            </a:r>
-          </a:p>
-          <a:p/>
-          <a:p>
-            <a:r>
-              <a:t>🎬 Delivery: Number each problem clearly — "first," "second," "third," "fourth." That cadence helps the audience follow along with the 4-card grid on screen.</a:t>
-            </a:r>
-          </a:p>
-          <a:p>
-            <a:r>
-              <a:t>➡ Transition: "Let me show you how our agent's abilities fix each one of these."</a:t>
+              <a:t>One — it's not personalized. Generic output, no memory of her characters or her age.</a:t>
+            </a:r>
+          </a:p>
+          <a:p/>
+          <a:p>
+            <a:r>
+              <a:t>Two — it's not customized. Every child gets the same prompt, the same answer.</a:t>
+            </a:r>
+          </a:p>
+          <a:p/>
+          <a:p>
+            <a:r>
+              <a:t>Three — no kid-suited news. Today's news products are adult-first.</a:t>
+            </a:r>
+          </a:p>
+          <a:p/>
+          <a:p>
+            <a:r>
+              <a:t>Four — no persistence. Every session resets — last week's character is forgotten.</a:t>
+            </a:r>
+          </a:p>
+          <a:p/>
+          <a:p>
+            <a:r>
+              <a:t>Existing AI extracts from kids. We collaborate with them."</a:t>
+            </a:r>
+          </a:p>
+          <a:p/>
+          <a:p>
+            <a:r>
+              <a:t>🎬 Number each problem — "one, two, three, four" — to match the grid on screen.</a:t>
+            </a:r>
+          </a:p>
+          <a:p>
+            <a:r>
+              <a:t>➡ Next: "Here's how our agent fixes each one."</a:t>
             </a:r>
           </a:p>
         </p:txBody>
@@ -2062,54 +1991,54 @@
           <a:lstStyle/>
           <a:p>
             <a:r>
-              <a:t>⏱ ~40 seconds · 5-min cut: KEEP</a:t>
-            </a:r>
-          </a:p>
-          <a:p/>
-          <a:p>
-            <a:r>
-              <a:t>"So here's how we solve each one.</a:t>
-            </a:r>
-          </a:p>
-          <a:p/>
-          <a:p>
-            <a:r>
-              <a:t>For "not personalized enough" — we built persona and character memory. The buddy is named by the child, customized by the child, and recurring characters like Lightning the puppy get recalled across every session through our character repository.</a:t>
-            </a:r>
-          </a:p>
-          <a:p/>
-          <a:p>
-            <a:r>
-              <a:t>For "not highly customized" — each child gets their own agent definition, with skills gated by their age. Three to five, six to eight, nine to twelve — different capability sets for each. And the buddy's persona flows as system context to every specialist underneath.</a:t>
-            </a:r>
-          </a:p>
-          <a:p/>
-          <a:p>
-            <a:r>
-              <a:t>For "no kid-news" — we have a dedicated kids-daily specialist. It uses age-stratified prompts, runs every reply through a safety review, and delivers the news as a kid-safe podcast in the buddy's own voice.</a:t>
-            </a:r>
-          </a:p>
-          <a:p/>
-          <a:p>
-            <a:r>
-              <a:t>And for "no persistence" — we use an agent repository, a character repository, and vector search. The buddy survives every session. One buddy, for life.</a:t>
-            </a:r>
-          </a:p>
-          <a:p/>
-          <a:p>
-            <a:r>
-              <a:t>And kids feel three things right away: the experience is interactive — the story streams as it writes itself. It's proactive — the buddy suggests and recalls. And it's persistent — same buddy persona, every time."</a:t>
-            </a:r>
-          </a:p>
-          <a:p/>
-          <a:p>
-            <a:r>
-              <a:t>🎬 Delivery: Walk problem-to-solution. The 1-to-1 mapping is the structure — say "for X, we built Y" for each row. End on the three feelings — those are what stick in the kid's memory.</a:t>
-            </a:r>
-          </a:p>
-          <a:p>
-            <a:r>
-              <a:t>➡ Transition: "All of these abilities are built on a small set of SDK primitives. Let me show you."</a:t>
+              <a:t>⏱ ~28 seconds · 5-min cut: KEEP</a:t>
+            </a:r>
+          </a:p>
+          <a:p/>
+          <a:p>
+            <a:r>
+              <a:t>"Four problems, four abilities — one for each.</a:t>
+            </a:r>
+          </a:p>
+          <a:p/>
+          <a:p>
+            <a:r>
+              <a:t>Not personalized — persona and character memory. Recurring characters recalled across every session.</a:t>
+            </a:r>
+          </a:p>
+          <a:p/>
+          <a:p>
+            <a:r>
+              <a:t>Not customized — per-child agent definitions, with skills gated by age.</a:t>
+            </a:r>
+          </a:p>
+          <a:p/>
+          <a:p>
+            <a:r>
+              <a:t>No kid-news — a dedicated kids-daily specialist: age-stratified, safety-reviewed, in the buddy's voice.</a:t>
+            </a:r>
+          </a:p>
+          <a:p/>
+          <a:p>
+            <a:r>
+              <a:t>No persistence — agent and character repositories, plus vector search. One buddy, for life.</a:t>
+            </a:r>
+          </a:p>
+          <a:p/>
+          <a:p>
+            <a:r>
+              <a:t>And kids feel three things: interactive, proactive, persistent."</a:t>
+            </a:r>
+          </a:p>
+          <a:p/>
+          <a:p>
+            <a:r>
+              <a:t>🎬 Walk problem-to-ability, tight. End on the three feelings.</a:t>
+            </a:r>
+          </a:p>
+          <a:p>
+            <a:r>
+              <a:t>➡ Next: "These abilities run on a small set of SDK primitives."</a:t>
             </a:r>
           </a:p>
         </p:txBody>
@@ -2179,60 +2108,60 @@
           <a:lstStyle/>
           <a:p>
             <a:r>
-              <a:t>⏱ ~45 seconds · 5-min cut: KEEP</a:t>
-            </a:r>
-          </a:p>
-          <a:p/>
-          <a:p>
-            <a:r>
-              <a:t>"We've built six agentic features into one stack.</a:t>
-            </a:r>
-          </a:p>
-          <a:p/>
-          <a:p>
-            <a:r>
-              <a:t>The first is interactive. We use server-sent events with async-generator agents, so the story writes itself token by token, right there on the kid's screen.</a:t>
-            </a:r>
-          </a:p>
-          <a:p/>
-          <a:p>
-            <a:r>
-              <a:t>The second is responsive. We use Claude Haiku for speed. Our intent routing combines deterministic keyword rules with LLM disambiguation, and each agent has its own curated set of skills.</a:t>
-            </a:r>
-          </a:p>
-          <a:p/>
-          <a:p>
-            <a:r>
-              <a:t>Third is proactive. Prompt engineering shapes the buddy's starter suggestions. Vector database recall surfaces recurring characters. And our character repository proposes the next move based on what the kid has done before.</a:t>
-            </a:r>
-          </a:p>
-          <a:p/>
-          <a:p>
-            <a:r>
-              <a:t>Fourth is persistent. Vector database plus SQL repositories hold the buddy across sessions. We use ChromaDB locally and pgvector in production.</a:t>
-            </a:r>
-          </a:p>
-          <a:p/>
-          <a:p>
-            <a:r>
-              <a:t>Fifth is reactive. Every reply runs through our safety MCP tool. We use age-aware thresholds — point-nine-zero for three to five year olds, point-eight-five for six to twelve. If a reply fails the safety check, we ask the model to suggest improvements and retry.</a:t>
-            </a:r>
-          </a:p>
-          <a:p/>
-          <a:p>
-            <a:r>
-              <a:t>And the sixth one — autonomous — is the next frontier. Multi-step planning, self-prompted explore loops, scheduled buddy initiatives. We're one ceiling away from this."</a:t>
-            </a:r>
-          </a:p>
-          <a:p/>
-          <a:p>
-            <a:r>
-              <a:t>🎬 Delivery: Walk row by row. Slow down on the reactive one — that's the safety story, the most important moat. When you say "autonomous," be clear it's future — say "this is what we're going to build next." Don't claim it as shipped.</a:t>
-            </a:r>
-          </a:p>
-          <a:p>
-            <a:r>
-              <a:t>➡ Transition: "But one agent alone hit a ceiling pretty quickly. So we extended to a team."</a:t>
+              <a:t>⏱ ~32 seconds · 5-min cut: KEEP</a:t>
+            </a:r>
+          </a:p>
+          <a:p/>
+          <a:p>
+            <a:r>
+              <a:t>"Six agentic features, one stack.</a:t>
+            </a:r>
+          </a:p>
+          <a:p/>
+          <a:p>
+            <a:r>
+              <a:t>Interactive — streaming SSE, so the story writes itself token by token.</a:t>
+            </a:r>
+          </a:p>
+          <a:p/>
+          <a:p>
+            <a:r>
+              <a:t>Responsive — Claude Haiku for speed, plus deterministic and LLM intent routing.</a:t>
+            </a:r>
+          </a:p>
+          <a:p/>
+          <a:p>
+            <a:r>
+              <a:t>Proactive — vector recall surfaces recurring characters and suggests next moves.</a:t>
+            </a:r>
+          </a:p>
+          <a:p/>
+          <a:p>
+            <a:r>
+              <a:t>Persistent — vector DB plus SQL repositories hold the buddy across sessions.</a:t>
+            </a:r>
+          </a:p>
+          <a:p/>
+          <a:p>
+            <a:r>
+              <a:t>Reactive — every reply runs through our safety tool, with age-aware thresholds.</a:t>
+            </a:r>
+          </a:p>
+          <a:p/>
+          <a:p>
+            <a:r>
+              <a:t>And autonomous — that's next: multi-step planning, scheduled buddy initiatives."</a:t>
+            </a:r>
+          </a:p>
+          <a:p/>
+          <a:p>
+            <a:r>
+              <a:t>🎬 Walk row by row. Slow down on reactive — that's the safety moat. Mark autonomous as future, not shipped.</a:t>
+            </a:r>
+          </a:p>
+          <a:p>
+            <a:r>
+              <a:t>➡ Next: "One agent hit a ceiling. So we extended to a team."</a:t>
             </a:r>
           </a:p>
         </p:txBody>
@@ -2302,54 +2231,54 @@
           <a:lstStyle/>
           <a:p>
             <a:r>
-              <a:t>⏱ ~32 seconds · 5-min cut: KEEP</a:t>
-            </a:r>
-          </a:p>
-          <a:p/>
-          <a:p>
-            <a:r>
-              <a:t>"There are four agent architecture patterns, and we use all four.</a:t>
-            </a:r>
-          </a:p>
-          <a:p/>
-          <a:p>
-            <a:r>
-              <a:t>The first is the single agent. One agent, one job, linear inference. We use this for simple flows like our audio narration — it just turns text into speech, no orchestration needed.</a:t>
-            </a:r>
-          </a:p>
-          <a:p/>
-          <a:p>
-            <a:r>
-              <a:t>The second is sub-agent fan-out. The same task gets spawned in parallel for speed. We use this when we need concurrent vision crops, or when we want to look up multiple characters from our repository at once.</a:t>
-            </a:r>
-          </a:p>
-          <a:p/>
-          <a:p>
-            <a:r>
-              <a:t>The third is the agent team. Multiple agents collaborate by role, each defined via an AgentDefinition. This is what our My Agent is — a proxy plus four role specialists plus a safety review subagent.</a:t>
-            </a:r>
-          </a:p>
-          <a:p/>
-          <a:p>
-            <a:r>
-              <a:t>The fourth is the multi-agent orchestrator. Agents get created dynamically at runtime. This is what makes us extensible — the proxy can register new AgentDefinitions on the fly.</a:t>
-            </a:r>
-          </a:p>
-          <a:p/>
-          <a:p>
-            <a:r>
-              <a:t>Now within a team, shared state flows through what we call the agent context — the persona, the child ID, the recurring characters all reach every specialist. And in the future, we'll extend this with agent-to-agent bridges to external teams."</a:t>
-            </a:r>
-          </a:p>
-          <a:p/>
-          <a:p>
-            <a:r>
-              <a:t>🎬 Delivery: Walk pattern by pattern with the concrete example. The "we use all four" line is the punchline — most teams pick one and force-fit everything else.</a:t>
-            </a:r>
-          </a:p>
-          <a:p>
-            <a:r>
-              <a:t>➡ Transition: "And every agent in the team is wired to six memory layers."</a:t>
+              <a:t>⏱ ~26 seconds · 5-min cut: KEEP</a:t>
+            </a:r>
+          </a:p>
+          <a:p/>
+          <a:p>
+            <a:r>
+              <a:t>"Four agent architecture patterns — and we use all four.</a:t>
+            </a:r>
+          </a:p>
+          <a:p/>
+          <a:p>
+            <a:r>
+              <a:t>Single agent — one job, linear inference. We use it for text-to-speech.</a:t>
+            </a:r>
+          </a:p>
+          <a:p/>
+          <a:p>
+            <a:r>
+              <a:t>Sub-agent fan-out — the same task in parallel, for speed.</a:t>
+            </a:r>
+          </a:p>
+          <a:p/>
+          <a:p>
+            <a:r>
+              <a:t>Agent team — multiple agents collaborating by role, each an AgentDefinition. That's our My Agent.</a:t>
+            </a:r>
+          </a:p>
+          <a:p/>
+          <a:p>
+            <a:r>
+              <a:t>Multi-agent orchestrator — agents created dynamically at runtime. That's what makes us extensible.</a:t>
+            </a:r>
+          </a:p>
+          <a:p/>
+          <a:p>
+            <a:r>
+              <a:t>Shared state flows to every specialist through the agent context. A2A to external teams is future work."</a:t>
+            </a:r>
+          </a:p>
+          <a:p/>
+          <a:p>
+            <a:r>
+              <a:t>🎬 Walk pattern by pattern. "We use all four" is the punchline.</a:t>
+            </a:r>
+          </a:p>
+          <a:p>
+            <a:r>
+              <a:t>➡ Next: "And every agent is wired to six memory layers."</a:t>
             </a:r>
           </a:p>
         </p:txBody>
@@ -2419,66 +2348,66 @@
           <a:lstStyle/>
           <a:p>
             <a:r>
-              <a:t>⏱ ~38 seconds · 5-min cut: KEEP</a:t>
-            </a:r>
-          </a:p>
-          <a:p/>
-          <a:p>
-            <a:r>
-              <a:t>"Memory is what makes a buddy actually feel like a buddy. We've broken it into six layers.</a:t>
-            </a:r>
-          </a:p>
-          <a:p/>
-          <a:p>
-            <a:r>
-              <a:t>Session memory — what was said in this conversation. We store it in the agent chat repository.</a:t>
-            </a:r>
-          </a:p>
-          <a:p/>
-          <a:p>
-            <a:r>
-              <a:t>Working memory — the per-turn execution context. The in-flight tool results, the persona, the recurring characters. All passed to every specialist via the agent context builder.</a:t>
-            </a:r>
-          </a:p>
-          <a:p/>
-          <a:p>
-            <a:r>
-              <a:t>Episodic memory — the kid's past creations. Stories, interactive sessions, kids-daily episodes. Three tables.</a:t>
-            </a:r>
-          </a:p>
-          <a:p/>
-          <a:p>
-            <a:r>
-              <a:t>Factual memory — buddy persona, child profile, preferences. That lives in the agent repository, the preference repository, and the users table.</a:t>
-            </a:r>
-          </a:p>
-          <a:p/>
-          <a:p>
-            <a:r>
-              <a:t>Semantic memory — embeddings of characters, themes, narrative style. ChromaDB locally, pgvector in production, accessed via our vector search MCP.</a:t>
-            </a:r>
-          </a:p>
-          <a:p/>
-          <a:p>
-            <a:r>
-              <a:t>And procedural memory — how the buddy actually generates each kind of content. That's our versioned markdown prompts, our at-tool skills, and the enabled-skills gating on each agent.</a:t>
-            </a:r>
-          </a:p>
-          <a:p/>
-          <a:p>
-            <a:r>
-              <a:t>So put it all together: the buddy remembers, understands, acts, talks, and reasons in flight."</a:t>
-            </a:r>
-          </a:p>
-          <a:p/>
-          <a:p>
-            <a:r>
-              <a:t>🎬 Delivery: Walk each layer briskly. Slow down on procedural memory — that's the one most teams don't have, and it's worth a beat. End on the closing line slowly: "remembers, understands, acts, talks, and reasons in flight."</a:t>
-            </a:r>
-          </a:p>
-          <a:p>
-            <a:r>
-              <a:t>➡ Transition: "And here's how those memory layers and the four patterns compose together in our actual team."</a:t>
+              <a:t>⏱ ~28 seconds · 5-min cut: KEEP</a:t>
+            </a:r>
+          </a:p>
+          <a:p/>
+          <a:p>
+            <a:r>
+              <a:t>"Memory is what makes a buddy feel like a buddy. Six layers.</a:t>
+            </a:r>
+          </a:p>
+          <a:p/>
+          <a:p>
+            <a:r>
+              <a:t>Session — this conversation's history.</a:t>
+            </a:r>
+          </a:p>
+          <a:p/>
+          <a:p>
+            <a:r>
+              <a:t>Working — the per-turn execution context.</a:t>
+            </a:r>
+          </a:p>
+          <a:p/>
+          <a:p>
+            <a:r>
+              <a:t>Episodic — past creations: stories, podcasts, choices.</a:t>
+            </a:r>
+          </a:p>
+          <a:p/>
+          <a:p>
+            <a:r>
+              <a:t>Factual — persona, child profile, preferences.</a:t>
+            </a:r>
+          </a:p>
+          <a:p/>
+          <a:p>
+            <a:r>
+              <a:t>Semantic — embeddings of characters and themes, in our vector store.</a:t>
+            </a:r>
+          </a:p>
+          <a:p/>
+          <a:p>
+            <a:r>
+              <a:t>Procedural — how the buddy generates each kind of content.</a:t>
+            </a:r>
+          </a:p>
+          <a:p/>
+          <a:p>
+            <a:r>
+              <a:t>Put it together: the buddy remembers, understands, acts, talks, and reasons in flight."</a:t>
+            </a:r>
+          </a:p>
+          <a:p/>
+          <a:p>
+            <a:r>
+              <a:t>🎬 Brisk through the six. Slow down on procedural — most teams don't have it. Land the closing line.</a:t>
+            </a:r>
+          </a:p>
+          <a:p>
+            <a:r>
+              <a:t>➡ Next: "Here's how the layers and patterns compose in our team."</a:t>
             </a:r>
           </a:p>
         </p:txBody>
@@ -2548,78 +2477,78 @@
           <a:lstStyle/>
           <a:p>
             <a:r>
-              <a:t>⏱ ~55 seconds · 5-min cut: KEEP</a:t>
-            </a:r>
-          </a:p>
-          <a:p/>
-          <a:p>
-            <a:r>
-              <a:t>"This is the architecture. Branching adventures, daily podcasts, per-reply safety — each one needed its own expertise. So we extended to an agent team. All still on the Claude Agent SDK.</a:t>
-            </a:r>
-          </a:p>
-          <a:p/>
-          <a:p>
-            <a:r>
-              <a:t>[point at the proxy node at the top]</a:t>
-            </a:r>
-          </a:p>
-          <a:p/>
-          <a:p>
-            <a:r>
-              <a:t>When a child sends a message, the proxy receives it first. The proxy orchestrates everything — it routes the intent using a mix of deterministic rules and LLM disambiguation.</a:t>
-            </a:r>
-          </a:p>
-          <a:p/>
-          <a:p>
-            <a:r>
-              <a:t>[point at the specialists and tools in the middle]</a:t>
-            </a:r>
-          </a:p>
-          <a:p/>
-          <a:p>
-            <a:r>
-              <a:t>Then it hands off to the right capability. Image story, interactive story, and Kids Daily are product specialists; audio narration is a reusable TTS tool. Each one has its own prompt or typed interface, its own tools, and its own skill set.</a:t>
-            </a:r>
-          </a:p>
-          <a:p/>
-          <a:p>
-            <a:r>
-              <a:t>[point at safety_review at the bottom — pause briefly]</a:t>
-            </a:r>
-          </a:p>
-          <a:p/>
-          <a:p>
-            <a:r>
-              <a:t>But here's the part that earns the trust. Every reply passes through safety review. That subagent is the non-negotiable gate before anything ever reaches the child.</a:t>
-            </a:r>
-          </a:p>
-          <a:p/>
-          <a:p>
-            <a:r>
-              <a:t>[point at the shared context bus underneath]</a:t>
-            </a:r>
-          </a:p>
-          <a:p/>
-          <a:p>
-            <a:r>
-              <a:t>And underneath all of it is shared context. Persona, tone, style, skills, topics, goals, child ID, age, and recurring characters all flow through the same orchestration path. So Lightning the puppy in the story is the same Lightning in the podcast. The character continuity is built in at the architecture level through character memory and vector recall.</a:t>
-            </a:r>
-          </a:p>
-          <a:p/>
-          <a:p>
-            <a:r>
-              <a:t>This unlocks three things. We're responsive — the right specialist runs in milliseconds. We're dynamic — different experience per turn, without changing the chat surface. And we're A2A extensible — adding a new specialist takes one AgentDefinition."</a:t>
-            </a:r>
-          </a:p>
-          <a:p/>
-          <a:p>
-            <a:r>
-              <a:t>🎬 Delivery: This is the centerpiece slide. Walk top to bottom, taking your time. Pause after "before it ever reaches the child" — that's the moment that earns judges' trust. Don't rush.</a:t>
-            </a:r>
-          </a:p>
-          <a:p>
-            <a:r>
-              <a:t>➡ Transition: "None of these were accidents. Every primitive in this architecture earned its place."</a:t>
+              <a:t>⏱ ~38 seconds · 5-min cut: KEEP</a:t>
+            </a:r>
+          </a:p>
+          <a:p/>
+          <a:p>
+            <a:r>
+              <a:t>"This is the architecture. Each surface needed its own expertise — so we built an agent team, on the Claude Agent SDK.</a:t>
+            </a:r>
+          </a:p>
+          <a:p/>
+          <a:p>
+            <a:r>
+              <a:t>[point at the proxy]</a:t>
+            </a:r>
+          </a:p>
+          <a:p/>
+          <a:p>
+            <a:r>
+              <a:t>A child's message hits the proxy first. It orchestrates — routes intent with deterministic rules plus LLM disambiguation.</a:t>
+            </a:r>
+          </a:p>
+          <a:p/>
+          <a:p>
+            <a:r>
+              <a:t>[point at the specialists]</a:t>
+            </a:r>
+          </a:p>
+          <a:p/>
+          <a:p>
+            <a:r>
+              <a:t>Then the right capability runs — image story, interactive story, and Kids Daily are specialists; audio narration is a reusable TTS tool. Each has its own prompt and tools.</a:t>
+            </a:r>
+          </a:p>
+          <a:p/>
+          <a:p>
+            <a:r>
+              <a:t>[point at safety_review — pause]</a:t>
+            </a:r>
+          </a:p>
+          <a:p/>
+          <a:p>
+            <a:r>
+              <a:t>Every reply passes through safety review before it reaches the child. That's the non-negotiable gate.</a:t>
+            </a:r>
+          </a:p>
+          <a:p/>
+          <a:p>
+            <a:r>
+              <a:t>[point at the context bus]</a:t>
+            </a:r>
+          </a:p>
+          <a:p/>
+          <a:p>
+            <a:r>
+              <a:t>And underneath, shared context — persona, characters — flows to every agent. Same character in the story and the podcast.</a:t>
+            </a:r>
+          </a:p>
+          <a:p/>
+          <a:p>
+            <a:r>
+              <a:t>This unlocks responsive, dynamic, and A2A-extensible."</a:t>
+            </a:r>
+          </a:p>
+          <a:p/>
+          <a:p>
+            <a:r>
+              <a:t>🎬 Centerpiece slide. Walk top to bottom. Pause after "before it reaches the child."</a:t>
+            </a:r>
+          </a:p>
+          <a:p>
+            <a:r>
+              <a:t>➡ Next: "Every primitive here earned its place."</a:t>
             </a:r>
           </a:p>
         </p:txBody>
@@ -2689,54 +2618,54 @@
           <a:lstStyle/>
           <a:p>
             <a:r>
-              <a:t>⏱ ~32 seconds · 5-min cut: KEEP</a:t>
-            </a:r>
-          </a:p>
-          <a:p/>
-          <a:p>
-            <a:r>
-              <a:t>"Now let me show you the infrastructure. Three managed services, one HTTPS hop between each.</a:t>
-            </a:r>
-          </a:p>
-          <a:p/>
-          <a:p>
-            <a:r>
-              <a:t>At the top, Vercel hosts the frontend. It's a React single-page app served from a CDN — static files, fast everywhere.</a:t>
-            </a:r>
-          </a:p>
-          <a:p/>
-          <a:p>
-            <a:r>
-              <a:t>In the middle, Railway runs the FastAPI backend. That's where the Claude Agent SDK lives, along with our seven MCP servers. Railway auto-deploys whenever we push to main.</a:t>
-            </a:r>
-          </a:p>
-          <a:p/>
-          <a:p>
-            <a:r>
-              <a:t>At the bottom, Supabase is the database. Postgres plus pgvector for embeddings, plus auth, plus file storage. It's a managed service, always on.</a:t>
-            </a:r>
-          </a:p>
-          <a:p/>
-          <a:p>
-            <a:r>
-              <a:t>And on the side, we use a handful of AI APIs — Anthropic for Claude, OpenAI for TTS, ElevenLabs for premium voices, and Tavily for kid-safe web search.</a:t>
-            </a:r>
-          </a:p>
-          <a:p/>
-          <a:p>
-            <a:r>
-              <a:t>The thing I want you to take away is — each service does one job. Each HTTPS hop is one boundary. There's no magic, no monorepo coupling. We can replace any layer without touching the others."</a:t>
-            </a:r>
-          </a:p>
-          <a:p/>
-          <a:p>
-            <a:r>
-              <a:t>🎬 Delivery: Trace the diagram top to bottom as you speak. The closing line — "no magic, no monorepo coupling" — is what earns the architecture credit. Say it slowly.</a:t>
-            </a:r>
-          </a:p>
-          <a:p>
-            <a:r>
-              <a:t>➡ Transition: "And inside the backend, the same discipline holds."</a:t>
+              <a:t>⏱ ~24 seconds · 5-min cut: KEEP</a:t>
+            </a:r>
+          </a:p>
+          <a:p/>
+          <a:p>
+            <a:r>
+              <a:t>"The infrastructure is three managed services.</a:t>
+            </a:r>
+          </a:p>
+          <a:p/>
+          <a:p>
+            <a:r>
+              <a:t>Vercel hosts the frontend — a React app on a CDN.</a:t>
+            </a:r>
+          </a:p>
+          <a:p/>
+          <a:p>
+            <a:r>
+              <a:t>Railway runs the FastAPI backend — the Agent SDK and seven MCP servers, auto-deployed from main.</a:t>
+            </a:r>
+          </a:p>
+          <a:p/>
+          <a:p>
+            <a:r>
+              <a:t>Supabase is the database — Postgres with pgvector, plus auth and storage.</a:t>
+            </a:r>
+          </a:p>
+          <a:p/>
+          <a:p>
+            <a:r>
+              <a:t>Plus AI APIs — Anthropic, OpenAI, ElevenLabs, Tavily.</a:t>
+            </a:r>
+          </a:p>
+          <a:p/>
+          <a:p>
+            <a:r>
+              <a:t>Each service does one job. No magic, no monorepo coupling."</a:t>
+            </a:r>
+          </a:p>
+          <a:p/>
+          <a:p>
+            <a:r>
+              <a:t>🎬 Trace top to bottom. Land "no magic, no monorepo coupling" slowly.</a:t>
+            </a:r>
+          </a:p>
+          <a:p>
+            <a:r>
+              <a:t>➡ Next: "Inside the backend, the same discipline holds."</a:t>
             </a:r>
           </a:p>
         </p:txBody>
